--- a/docs/proposal/K09_Sidang_Proposal_DeteksiPedestrianLowLight.pptx
+++ b/docs/proposal/K09_Sidang_Proposal_DeteksiPedestrianLowLight.pptx
@@ -3307,7 +3307,7 @@
               </a:defRPr>
             </a:pPr>
             <a:r>
-              <a:t>•  Krisantus Linardi  —  Data &amp; Preprocessing Lead</a:t>
+              <a:t>•  Krisantus Amka Ginting  —  Data &amp; Preprocessing Lead</a:t>
             </a:r>
           </a:p>
           <a:p>
@@ -3336,7 +3336,7 @@
               </a:defRPr>
             </a:pPr>
             <a:r>
-              <a:t>•  Kristofer Leonard  —  Model &amp; Deployment Lead</a:t>
+              <a:t>•  Linardi Halim  —  Documentation &amp; Reporting Lead</a:t>
             </a:r>
           </a:p>
           <a:p>
@@ -3349,7 +3349,59 @@
               </a:defRPr>
             </a:pPr>
             <a:r>
-              <a:t>    Pelatihan model YOLOv8-Nano, eksperimen terkontrol komparatif, evaluasi Recall, dan prototype Streamlit.</a:t>
+              <a:t>    Penyusunan proposal dan laporan teknis, naskah presentasi, serta rekap tracker dan logbook.</a:t>
+            </a:r>
+          </a:p>
+          <a:p>
+            <a:pPr>
+              <a:defRPr sz="1200" b="1">
+                <a:solidFill>
+                  <a:srgbClr val="F8FAFC"/>
+                </a:solidFill>
+                <a:latin typeface="Segoe UI"/>
+              </a:defRPr>
+            </a:pPr>
+            <a:r>
+              <a:t>•  Kristofer Ryan Giggs Eka Saputra  —  Model &amp; Training Lead</a:t>
+            </a:r>
+          </a:p>
+          <a:p>
+            <a:pPr>
+              <a:defRPr sz="1000">
+                <a:solidFill>
+                  <a:srgbClr val="94A3B8"/>
+                </a:solidFill>
+                <a:latin typeface="Segoe UI"/>
+              </a:defRPr>
+            </a:pPr>
+            <a:r>
+              <a:t>    Pelatihan model YOLOv8-Nano, eksperimen terkontrol komparatif, evaluasi Recall, dan benchmark FPS.</a:t>
+            </a:r>
+          </a:p>
+          <a:p>
+            <a:pPr>
+              <a:defRPr sz="1200" b="1">
+                <a:solidFill>
+                  <a:srgbClr val="F8FAFC"/>
+                </a:solidFill>
+                <a:latin typeface="Segoe UI"/>
+              </a:defRPr>
+            </a:pPr>
+            <a:r>
+              <a:t>•  Leonard Franscois  —  Demo &amp; Deployment Lead</a:t>
+            </a:r>
+          </a:p>
+          <a:p>
+            <a:pPr>
+              <a:defRPr sz="1000">
+                <a:solidFill>
+                  <a:srgbClr val="94A3B8"/>
+                </a:solidFill>
+                <a:latin typeface="Segoe UI"/>
+              </a:defRPr>
+            </a:pPr>
+            <a:r>
+              <a:t>    Prototype demo inferensi, dokumentasi repository, dan organisational video cadangan.</a:t>
             </a:r>
           </a:p>
         </p:txBody>
@@ -4270,7 +4322,7 @@
               </a:defRPr>
             </a:pPr>
             <a:r>
-              <a:t>Kelompok 9 (Kelas 5PITA) — Krisantus Linardi &amp; Kristofer Leonard</a:t>
+              <a:t>Kelompok 9 (Kelas 5PITA) — Krisantus Amka Ginting, Linardi Halim, Kristofer Ryan Giggs Eka Saputra, Leonard Franscois</a:t>
             </a:r>
             <a:br/>
             <a:r>
@@ -9964,7 +10016,7 @@
               </a:defRPr>
             </a:pPr>
             <a:r>
-              <a:t>Krisantus Linardi</a:t>
+              <a:t>Krisantus Amka Ginting  &amp;  Linardi Halim</a:t>
             </a:r>
           </a:p>
           <a:p>
@@ -9980,7 +10032,7 @@
               </a:defRPr>
             </a:pPr>
             <a:r>
-              <a:t>•  Lead Data Strategy &amp; Preprocessing Pipeline</a:t>
+              <a:t>•  Data Strategy, Preprocessing &amp; Documentation</a:t>
             </a:r>
           </a:p>
           <a:p>
@@ -10028,7 +10080,7 @@
               </a:defRPr>
             </a:pPr>
             <a:r>
-              <a:t>•    • Implementasi modul penajaman citra adaptif (CLAHE kanal-L &amp; Gamma).</a:t>
+              <a:t>•    • Implementasi modul pencerahan citra adaptif (CLAHE kanal-L &amp; Gamma).</a:t>
             </a:r>
           </a:p>
           <a:p>
@@ -10044,7 +10096,7 @@
               </a:defRPr>
             </a:pPr>
             <a:r>
-              <a:t>•    • Validasi pemisahan dataset dan pencegahan data leakage.</a:t>
+              <a:t>•    • Penyusunan proposal, laporan teknis, dan rekap tracker/logbook.</a:t>
             </a:r>
           </a:p>
         </p:txBody>
@@ -10144,7 +10196,7 @@
               </a:defRPr>
             </a:pPr>
             <a:r>
-              <a:t>Kristofer Leonard</a:t>
+              <a:t>Kristofer Ryan Giggs Eka Saputra  &amp;  Leonard Franscois</a:t>
             </a:r>
           </a:p>
           <a:p>
@@ -10160,7 +10212,7 @@
               </a:defRPr>
             </a:pPr>
             <a:r>
-              <a:t>•  Lead Model Architecture &amp; Inference Deployment</a:t>
+              <a:t>•  Model Architecture, Training &amp; Deployment</a:t>
             </a:r>
           </a:p>
           <a:p>
@@ -10224,7 +10276,7 @@
               </a:defRPr>
             </a:pPr>
             <a:r>
-              <a:t>•    • Benchmarking FPS &amp; pembangunan prototype aplikasi demo inferensi.</a:t>
+              <a:t>•    • Benchmarking FPS, prototype demo inferensi, dan video cadangan.</a:t>
             </a:r>
           </a:p>
         </p:txBody>
